--- a/dist/초3/수학/도형과측정/초3_수학_도형과측정_05_초와시간의계산_학생용.pptx
+++ b/dist/초3/수학/도형과측정/초3_수학_도형과측정_05_초와시간의계산_학생용.pptx
@@ -121,13 +121,13 @@
   <p:extLst>
     <p:ext uri="{521415D9-36F7-43E2-AB2F-B90AF26B5E84}">
       <p14:sectionLst xmlns:p14="http://schemas.microsoft.com/office/powerpoint/2010/main">
-        <p14:section name="도입" id="{b53e27c9-0321-31f0-7cfc-516e2538f5e9}">
+        <p14:section name="도입" id="{f8b67738-f4ea-3216-04ce-59656d83e7cb}">
           <p14:sldIdLst>
             <p14:sldId id="256"/>
             <p14:sldId id="257"/>
           </p14:sldIdLst>
         </p14:section>
-        <p14:section name="개념" id="{b4ad5e9e-5be7-6055-3c69-bb05f494d3b0}">
+        <p14:section name="개념" id="{581b769a-5a7e-a0f8-9db5-fd23c833cd3a}">
           <p14:sldIdLst>
             <p14:sldId id="258"/>
             <p14:sldId id="259"/>
@@ -137,31 +137,31 @@
             <p14:sldId id="265"/>
           </p14:sldIdLst>
         </p14:section>
-        <p14:section name="연습" id="{49e741af-d32f-b6a5-fce9-ad826f989eb5}">
+        <p14:section name="연습" id="{837dc623-aa9d-0462-3c22-ae41ef9fc91e}">
           <p14:sldIdLst>
             <p14:sldId id="261"/>
             <p14:sldId id="262"/>
             <p14:sldId id="266"/>
           </p14:sldIdLst>
         </p14:section>
-        <p14:section name="개념" id="{a984f58b-c4b1-d3f7-bebe-32b52c1ef4f3}">
+        <p14:section name="개념" id="{b26bbb0d-5b86-2aa7-3324-1e4725b03411}">
           <p14:sldIdLst/>
         </p14:section>
-        <p14:section name="연습" id="{47203e9a-430d-c014-b284-c97b0e5ffe98}">
+        <p14:section name="연습" id="{bf26d8cf-dfd7-69f5-11ad-ce8619550552}">
           <p14:sldIdLst/>
         </p14:section>
-        <p14:section name="확인" id="{94128bc8-27cf-c671-3d0d-b18c4ab251e7}">
+        <p14:section name="확인" id="{af3ea223-af75-720c-6be0-fa06754bd3e0}">
           <p14:sldIdLst>
             <p14:sldId id="267"/>
             <p14:sldId id="268"/>
           </p14:sldIdLst>
         </p14:section>
-        <p14:section name="정리" id="{2fee7688-184c-8c3f-6eff-65c678b4b8e7}">
+        <p14:section name="정리" id="{c830312a-08d8-a13b-ca78-410c73e37f15}">
           <p14:sldIdLst>
             <p14:sldId id="269"/>
           </p14:sldIdLst>
         </p14:section>
-        <p14:section name="보충" id="{8fca1450-6634-132a-c9d9-abb6f9f65a09}">
+        <p14:section name="보충" id="{649565fe-d4d9-f4bf-f00a-8b6fce3e3eee}">
           <p14:sldIdLst>
             <p14:sldId id="270"/>
           </p14:sldIdLst>
@@ -2955,7 +2955,7 @@
           </p:nvPr>
         </p:nvGraphicFramePr>
         <p:xfrm>
-          <a:off x="7909560" y="1046480"/>
+          <a:off x="7909560" y="1079500"/>
           <a:ext cx="3474720" cy="914400"/>
         </p:xfrm>
         <a:graphic>
@@ -2968,7 +2968,7 @@
                 <a:gridCol w="868680"/>
                 <a:gridCol w="868680"/>
               </a:tblGrid>
-              <a:tr h="528320">
+              <a:tr h="511810">
                 <a:tc>
                   <a:txBody>
                     <a:bodyPr/>
@@ -3231,7 +3231,7 @@
                   </a:tcPr>
                 </a:tc>
               </a:tr>
-              <a:tr h="528320">
+              <a:tr h="511810">
                 <a:tc>
                   <a:txBody>
                     <a:bodyPr/>
@@ -3483,7 +3483,7 @@
                   </a:tcPr>
                 </a:tc>
               </a:tr>
-              <a:tr h="528320">
+              <a:tr h="511810">
                 <a:tc>
                   <a:txBody>
                     <a:bodyPr/>
@@ -3746,7 +3746,7 @@
                   </a:tcPr>
                 </a:tc>
               </a:tr>
-              <a:tr h="528320">
+              <a:tr h="511810">
                 <a:tc>
                   <a:txBody>
                     <a:bodyPr/>
@@ -4300,7 +4300,7 @@
           </p:nvPr>
         </p:nvGraphicFramePr>
         <p:xfrm>
-          <a:off x="7284750" y="2143760"/>
+          <a:off x="7284750" y="2188210"/>
           <a:ext cx="4206240" cy="914400"/>
         </p:xfrm>
         <a:graphic>
@@ -4313,7 +4313,7 @@
                 <a:gridCol w="1051560"/>
                 <a:gridCol w="1051560"/>
               </a:tblGrid>
-              <a:tr h="568960">
+              <a:tr h="551180">
                 <a:tc>
                   <a:txBody>
                     <a:bodyPr/>
@@ -4576,7 +4576,7 @@
                   </a:tcPr>
                 </a:tc>
               </a:tr>
-              <a:tr h="568960">
+              <a:tr h="551180">
                 <a:tc>
                   <a:txBody>
                     <a:bodyPr/>
@@ -4817,7 +4817,7 @@
                   </a:tcPr>
                 </a:tc>
               </a:tr>
-              <a:tr h="568960">
+              <a:tr h="551180">
                 <a:tc>
                   <a:txBody>
                     <a:bodyPr/>
@@ -5069,7 +5069,7 @@
                   </a:tcPr>
                 </a:tc>
               </a:tr>
-              <a:tr h="568960">
+              <a:tr h="551180">
                 <a:tc>
                   <a:txBody>
                     <a:bodyPr/>
@@ -5332,7 +5332,7 @@
                   </a:tcPr>
                 </a:tc>
               </a:tr>
-              <a:tr h="568960">
+              <a:tr h="551180">
                 <a:tc>
                   <a:txBody>
                     <a:bodyPr/>
@@ -6055,7 +6055,7 @@
           </p:nvPr>
         </p:nvGraphicFramePr>
         <p:xfrm>
-          <a:off x="6855714" y="1660144"/>
+          <a:off x="6855714" y="1701419"/>
           <a:ext cx="4206240" cy="914400"/>
         </p:xfrm>
         <a:graphic>
@@ -6068,7 +6068,7 @@
                 <a:gridCol w="1051560"/>
                 <a:gridCol w="1051560"/>
               </a:tblGrid>
-              <a:tr h="528320">
+              <a:tr h="511810">
                 <a:tc>
                   <a:txBody>
                     <a:bodyPr/>
@@ -6331,7 +6331,7 @@
                   </a:tcPr>
                 </a:tc>
               </a:tr>
-              <a:tr h="528320">
+              <a:tr h="511810">
                 <a:tc>
                   <a:txBody>
                     <a:bodyPr/>
@@ -6572,7 +6572,7 @@
                   </a:tcPr>
                 </a:tc>
               </a:tr>
-              <a:tr h="528320">
+              <a:tr h="511810">
                 <a:tc>
                   <a:txBody>
                     <a:bodyPr/>
@@ -6824,7 +6824,7 @@
                   </a:tcPr>
                 </a:tc>
               </a:tr>
-              <a:tr h="528320">
+              <a:tr h="511810">
                 <a:tc>
                   <a:txBody>
                     <a:bodyPr/>
@@ -7087,7 +7087,7 @@
                   </a:tcPr>
                 </a:tc>
               </a:tr>
-              <a:tr h="528320">
+              <a:tr h="511810">
                 <a:tc>
                   <a:txBody>
                     <a:bodyPr/>
@@ -15658,7 +15658,7 @@
               <a:buNone/>
             </a:pPr>
             <a:r>
-              <a:rPr lang="ko-KR" altLang="en-US" sz="3400" b="1" dirty="0">
+              <a:rPr lang="en-US" altLang="ko-KR" sz="3400" b="1" dirty="0">
                 <a:solidFill>
                   <a:srgbClr val="1F2937"/>
                 </a:solidFill>
@@ -23207,7 +23207,7 @@
           </p:nvPr>
         </p:nvGraphicFramePr>
         <p:xfrm>
-          <a:off x="7284750" y="2143760"/>
+          <a:off x="7284750" y="2188210"/>
           <a:ext cx="4206240" cy="914400"/>
         </p:xfrm>
         <a:graphic>
@@ -23220,7 +23220,7 @@
                 <a:gridCol w="1051560"/>
                 <a:gridCol w="1051560"/>
               </a:tblGrid>
-              <a:tr h="568960">
+              <a:tr h="551180">
                 <a:tc>
                   <a:txBody>
                     <a:bodyPr/>
@@ -23483,7 +23483,7 @@
                   </a:tcPr>
                 </a:tc>
               </a:tr>
-              <a:tr h="568960">
+              <a:tr h="551180">
                 <a:tc>
                   <a:txBody>
                     <a:bodyPr/>
@@ -23724,7 +23724,7 @@
                   </a:tcPr>
                 </a:tc>
               </a:tr>
-              <a:tr h="568960">
+              <a:tr h="551180">
                 <a:tc>
                   <a:txBody>
                     <a:bodyPr/>
@@ -23976,7 +23976,7 @@
                   </a:tcPr>
                 </a:tc>
               </a:tr>
-              <a:tr h="568960">
+              <a:tr h="551180">
                 <a:tc>
                   <a:txBody>
                     <a:bodyPr/>
@@ -24239,7 +24239,7 @@
                   </a:tcPr>
                 </a:tc>
               </a:tr>
-              <a:tr h="568960">
+              <a:tr h="551180">
                 <a:tc>
                   <a:txBody>
                     <a:bodyPr/>
@@ -25001,7 +25001,7 @@
           </p:nvPr>
         </p:nvGraphicFramePr>
         <p:xfrm>
-          <a:off x="7284750" y="2143760"/>
+          <a:off x="7284750" y="2188210"/>
           <a:ext cx="4206240" cy="914400"/>
         </p:xfrm>
         <a:graphic>
@@ -25014,7 +25014,7 @@
                 <a:gridCol w="1051560"/>
                 <a:gridCol w="1051560"/>
               </a:tblGrid>
-              <a:tr h="568960">
+              <a:tr h="551180">
                 <a:tc>
                   <a:txBody>
                     <a:bodyPr/>
@@ -25277,7 +25277,7 @@
                   </a:tcPr>
                 </a:tc>
               </a:tr>
-              <a:tr h="568960">
+              <a:tr h="551180">
                 <a:tc>
                   <a:txBody>
                     <a:bodyPr/>
@@ -25529,7 +25529,7 @@
                   </a:tcPr>
                 </a:tc>
               </a:tr>
-              <a:tr h="568960">
+              <a:tr h="551180">
                 <a:tc>
                   <a:txBody>
                     <a:bodyPr/>
@@ -25781,7 +25781,7 @@
                   </a:tcPr>
                 </a:tc>
               </a:tr>
-              <a:tr h="568960">
+              <a:tr h="551180">
                 <a:tc>
                   <a:txBody>
                     <a:bodyPr/>
@@ -26044,7 +26044,7 @@
                   </a:tcPr>
                 </a:tc>
               </a:tr>
-              <a:tr h="568960">
+              <a:tr h="551180">
                 <a:tc>
                   <a:txBody>
                     <a:bodyPr/>
